--- a/docs/EXOPHCA_Presentation.pptx
+++ b/docs/EXOPHCA_Presentation.pptx
@@ -4813,7 +4813,7 @@
 </file>
 
 <file path=ppt/slides/slide13.xml><?xml version="1.0" encoding="utf-8"?>
-<p:sld xmlns:a="http://schemas.openxmlformats.org/drawingml/2006/main" xmlns:r="http://schemas.openxmlformats.org/officeDocument/2006/relationships" xmlns:p="http://schemas.openxmlformats.org/presentationml/2006/main">
+<p:sld xmlns:a="http://schemas.openxmlformats.org/drawingml/2006/main" xmlns:p="http://schemas.openxmlformats.org/presentationml/2006/main">
   <p:cSld name="Slide 13">
     <p:bg>
       <p:bgPr>
@@ -4870,7 +4870,7 @@
                 <a:ea typeface="Calibri" pitchFamily="34" charset="-122"/>
                 <a:cs typeface="Calibri" pitchFamily="34" charset="-120"/>
               </a:rPr>
-              <a:t>A STRIKING FINDING</a:t>
+              <a:t>EARTH EXAMPLE</a:t>
             </a:r>
             <a:endParaRPr lang="en-US" sz="1300" dirty="0"/>
           </a:p>
@@ -4909,7 +4909,7 @@
                 <a:ea typeface="Cambria" pitchFamily="34" charset="-122"/>
                 <a:cs typeface="Cambria" pitchFamily="34" charset="-120"/>
               </a:rPr>
-              <a:t>Even Earth Doesn't Score Perfectly</a:t>
+              <a:t>Model Estimate and Formula Score</a:t>
             </a:r>
             <a:endParaRPr lang="en-US" sz="3200" dirty="0"/>
           </a:p>
@@ -4975,7 +4975,7 @@
                 <a:ea typeface="Calibri" pitchFamily="34" charset="-122"/>
                 <a:cs typeface="Calibri" pitchFamily="34" charset="-120"/>
               </a:rPr>
-              <a:t>Earth's True ESI</a:t>
+              <a:t>Earth's Formula ESI</a:t>
             </a:r>
             <a:endParaRPr lang="en-US" sz="1300" dirty="0"/>
           </a:p>
@@ -5053,7 +5053,7 @@
                 <a:ea typeface="Calibri" pitchFamily="34" charset="-122"/>
                 <a:cs typeface="Calibri" pitchFamily="34" charset="-120"/>
               </a:rPr>
-              <a:t>Exact score — Earth compared to itself</a:t>
+              <a:t>Base score for radius = 1 and insolation = 1</a:t>
             </a:r>
             <a:endParaRPr lang="en-US" sz="1150" dirty="0"/>
           </a:p>
@@ -5115,7 +5115,7 @@
                 <a:ea typeface="Calibri" pitchFamily="34" charset="-122"/>
                 <a:cs typeface="Calibri" pitchFamily="34" charset="-120"/>
               </a:rPr>
-              <a:t>Indirect Model's Prediction</a:t>
+              <a:t>Saved-model estimate</a:t>
             </a:r>
             <a:endParaRPr lang="en-US" sz="1300" dirty="0"/>
           </a:p>
@@ -5154,7 +5154,7 @@
                 <a:ea typeface="Cambria" pitchFamily="34" charset="-122"/>
                 <a:cs typeface="Cambria" pitchFamily="34" charset="-120"/>
               </a:rPr>
-              <a:t>~0.55</a:t>
+              <a:t>0.551</a:t>
             </a:r>
             <a:endParaRPr lang="en-US" sz="5000" dirty="0"/>
           </a:p>
@@ -5220,7 +5220,7 @@
                 <a:ea typeface="Calibri" pitchFamily="34" charset="-122"/>
                 <a:cs typeface="Calibri" pitchFamily="34" charset="-120"/>
               </a:rPr>
-              <a:t>Published Precedent</a:t>
+              <a:t/>
             </a:r>
             <a:endParaRPr lang="en-US" sz="1300" dirty="0"/>
           </a:p>
@@ -5259,7 +5259,7 @@
                 <a:ea typeface="Cambria" pitchFamily="34" charset="-122"/>
                 <a:cs typeface="Cambria" pitchFamily="34" charset="-120"/>
               </a:rPr>
-              <a:t>82%</a:t>
+              <a:t/>
             </a:r>
             <a:endParaRPr lang="en-US" sz="6000" dirty="0"/>
           </a:p>
@@ -5298,7 +5298,7 @@
                 <a:ea typeface="Calibri" pitchFamily="34" charset="-122"/>
                 <a:cs typeface="Calibri" pitchFamily="34" charset="-120"/>
               </a:rPr>
-              <a:t>Barnes et al. (2015) — Earth's score under a transit-based habitability index</a:t>
+              <a:t/>
             </a:r>
             <a:endParaRPr lang="en-US" sz="1150" dirty="0"/>
           </a:p>
@@ -5360,7 +5360,7 @@
                 <a:ea typeface="Calibri" pitchFamily="34" charset="-122"/>
                 <a:cs typeface="Calibri" pitchFamily="34" charset="-120"/>
               </a:rPr>
-              <a:t>Both results reveal the same effect: detection-biased training data can underrate even a confirmed habitable planet.</a:t>
+              <a:t>Model inputs: 365.25 days, 5,778 K, and a 10 pc placeholder. The prediction is not a habitability probability.</a:t>
             </a:r>
             <a:endParaRPr lang="en-US" sz="1250" dirty="0"/>
           </a:p>
@@ -5414,7 +5414,7 @@
 </file>
 
 <file path=ppt/slides/slide14.xml><?xml version="1.0" encoding="utf-8"?>
-<p:sld xmlns:a="http://schemas.openxmlformats.org/drawingml/2006/main" xmlns:r="http://schemas.openxmlformats.org/officeDocument/2006/relationships" xmlns:p="http://schemas.openxmlformats.org/presentationml/2006/main">
+<p:sld xmlns:a="http://schemas.openxmlformats.org/drawingml/2006/main" xmlns:a16="http://schemas.microsoft.com/office/drawing/2014/main" xmlns:p="http://schemas.openxmlformats.org/presentationml/2006/main" xmlns:p14="http://schemas.microsoft.com/office/powerpoint/2010/main" xmlns:r="http://schemas.openxmlformats.org/officeDocument/2006/relationships">
   <p:cSld name="Slide 14">
     <p:bg>
       <p:bgPr>
@@ -5471,7 +5471,7 @@
                 <a:ea typeface="Calibri" pitchFamily="34" charset="-122"/>
                 <a:cs typeface="Calibri" pitchFamily="34" charset="-120"/>
               </a:rPr>
-              <a:t>REAL-WORLD VALIDATION</a:t>
+              <a:t>TESS MODEL COMPARISON</a:t>
             </a:r>
             <a:endParaRPr lang="en-US" sz="1300" dirty="0"/>
           </a:p>
@@ -5510,7 +5510,7 @@
                 <a:ea typeface="Cambria" pitchFamily="34" charset="-122"/>
                 <a:cs typeface="Cambria" pitchFamily="34" charset="-120"/>
               </a:rPr>
-              <a:t>Ranking Real, Unconfirmed TESS Candidates</a:t>
+              <a:t>Saved-Model Rankings and Formula Scores</a:t>
             </a:r>
             <a:endParaRPr lang="en-US" sz="3200" dirty="0"/>
           </a:p>
@@ -5549,7 +5549,7 @@
                 <a:ea typeface="Calibri" pitchFamily="34" charset="-122"/>
                 <a:cs typeface="Calibri" pitchFamily="34" charset="-120"/>
               </a:rPr>
-              <a:t>The candidate-compatible model (R² = 0.811) was applied to 5,039 open TESS candidates — planets nobody has fully characterized yet.</a:t>
+              <a:t>5,039 open TOIs with model inputs. Random 80/20 held-out R2 = 0.8110; five-fold host-grouped OOF R2 = 0.8347.</a:t>
             </a:r>
             <a:endParaRPr lang="en-US" sz="1350" dirty="0"/>
           </a:p>
@@ -5564,7 +5564,7 @@
           <p:nvPr>
             <p:extLst>
               <p:ext uri="{D42A27DB-BD31-4B8C-83A1-F6EECF244321}">
-                <p14:modId xmlns:p14="http://schemas.microsoft.com/office/powerpoint/2010/main" val="1579011935"/>
+                <p14:modId val="1579011935"/>
               </p:ext>
             </p:extLst>
           </p:nvPr>
@@ -5581,35 +5581,35 @@
                 <a:gridCol w="2926080">
                   <a:extLst>
                     <a:ext uri="{9D8B030D-6E8A-4147-A177-3AD203B41FA5}">
-                      <a16:colId xmlns:a16="http://schemas.microsoft.com/office/drawing/2014/main" val="20000"/>
+                      <a16:colId val="20000"/>
                     </a:ext>
                   </a:extLst>
                 </a:gridCol>
                 <a:gridCol w="2286000">
                   <a:extLst>
                     <a:ext uri="{9D8B030D-6E8A-4147-A177-3AD203B41FA5}">
-                      <a16:colId xmlns:a16="http://schemas.microsoft.com/office/drawing/2014/main" val="20001"/>
+                      <a16:colId val="20001"/>
                     </a:ext>
                   </a:extLst>
                 </a:gridCol>
                 <a:gridCol w="2194560">
                   <a:extLst>
                     <a:ext uri="{9D8B030D-6E8A-4147-A177-3AD203B41FA5}">
-                      <a16:colId xmlns:a16="http://schemas.microsoft.com/office/drawing/2014/main" val="20002"/>
+                      <a16:colId val="20002"/>
                     </a:ext>
                   </a:extLst>
                 </a:gridCol>
                 <a:gridCol w="1828800">
                   <a:extLst>
                     <a:ext uri="{9D8B030D-6E8A-4147-A177-3AD203B41FA5}">
-                      <a16:colId xmlns:a16="http://schemas.microsoft.com/office/drawing/2014/main" val="20003"/>
+                      <a16:colId val="20003"/>
                     </a:ext>
                   </a:extLst>
                 </a:gridCol>
                 <a:gridCol w="1828800">
                   <a:extLst>
                     <a:ext uri="{9D8B030D-6E8A-4147-A177-3AD203B41FA5}">
-                      <a16:colId xmlns:a16="http://schemas.microsoft.com/office/drawing/2014/main" val="20004"/>
+                      <a16:colId val="20004"/>
                     </a:ext>
                   </a:extLst>
                 </a:gridCol>
@@ -5957,7 +5957,7 @@
                 </a:tc>
                 <a:extLst>
                   <a:ext uri="{0D108BD9-81ED-4DB2-BD59-A6C34878D82A}">
-                    <a16:rowId xmlns:a16="http://schemas.microsoft.com/office/drawing/2014/main" val="10000"/>
+                    <a16:rowId val="10000"/>
                   </a:ext>
                 </a:extLst>
               </a:tr>
@@ -6304,7 +6304,7 @@
                 </a:tc>
                 <a:extLst>
                   <a:ext uri="{0D108BD9-81ED-4DB2-BD59-A6C34878D82A}">
-                    <a16:rowId xmlns:a16="http://schemas.microsoft.com/office/drawing/2014/main" val="10001"/>
+                    <a16:rowId val="10001"/>
                   </a:ext>
                 </a:extLst>
               </a:tr>
@@ -6651,7 +6651,7 @@
                 </a:tc>
                 <a:extLst>
                   <a:ext uri="{0D108BD9-81ED-4DB2-BD59-A6C34878D82A}">
-                    <a16:rowId xmlns:a16="http://schemas.microsoft.com/office/drawing/2014/main" val="10002"/>
+                    <a16:rowId val="10002"/>
                   </a:ext>
                 </a:extLst>
               </a:tr>
@@ -6998,7 +6998,7 @@
                 </a:tc>
                 <a:extLst>
                   <a:ext uri="{0D108BD9-81ED-4DB2-BD59-A6C34878D82A}">
-                    <a16:rowId xmlns:a16="http://schemas.microsoft.com/office/drawing/2014/main" val="10003"/>
+                    <a16:rowId val="10003"/>
                   </a:ext>
                 </a:extLst>
               </a:tr>
@@ -7345,7 +7345,7 @@
                 </a:tc>
                 <a:extLst>
                   <a:ext uri="{0D108BD9-81ED-4DB2-BD59-A6C34878D82A}">
-                    <a16:rowId xmlns:a16="http://schemas.microsoft.com/office/drawing/2014/main" val="10004"/>
+                    <a16:rowId val="10004"/>
                   </a:ext>
                 </a:extLst>
               </a:tr>
@@ -7386,7 +7386,7 @@
                 <a:ea typeface="Calibri" pitchFamily="34" charset="-122"/>
                 <a:cs typeface="Calibri" pitchFamily="34" charset="-120"/>
               </a:rPr>
-              <a:t>Nearly all top-ranked candidates orbit cool K/M-dwarf stars (2,800–4,300K) — physically coherent, since even short orbits stay temperate around dimmer stars.</a:t>
+              <a:t>TESS (4,850 rows): R2 0.6794; Spearman 0.8371; model/formula top-21 overlap 5. Five-feature training OOF top-21 overlap 6.</a:t>
             </a:r>
             <a:endParaRPr lang="en-US" sz="1250" dirty="0"/>
           </a:p>
@@ -7491,7 +7491,7 @@
                 <a:ea typeface="Calibri" pitchFamily="34" charset="-122"/>
                 <a:cs typeface="Calibri" pitchFamily="34" charset="-120"/>
               </a:rPr>
-              <a:t>TOI-6714.01 sits just 26.7 parsecs away — the closest candidate, and a strong real-world follow-up target.</a:t>
+              <a:t>TOI-7347.01 is a formula-ranked lead; it remains unconfirmed and fails the strict habitability gate.</a:t>
             </a:r>
             <a:endParaRPr lang="en-US" sz="1300" dirty="0"/>
           </a:p>
